--- a/cursos/recursos/aperturas-y-defensas/02-defensa-siciliana-variante-najdorf.pptx
+++ b/cursos/recursos/aperturas-y-defensas/02-defensa-siciliana-variante-najdorf.pptx
@@ -1602,7 +1602,7 @@
                 <a:ea typeface="Calibri" pitchFamily="34" charset="-122"/>
                 <a:cs typeface="Calibri" pitchFamily="34" charset="-120"/>
               </a:rPr>
-              <a:t>1.e4 c5 2.Nf3 d6 3.d4 cxd4 4.Nxd4 Nf6 5.Nc3 a6 es la Najdorf: negras retrasan el desarrollo de piezas menores para jugar ...a6 (evita Bb5+ o Nb5) y luego busca contrajuego en el flanco de dama con ...b5 mientras blancas ataca en el flanco de rey.</a:t>
+              <a:t>1.e4 c5 2.Cf3 d6 3.d4 cxd4 4.Cxd4 Cf6 5.Cc3 a6 es la Najdorf: negras retrasan el desarrollo de piezas menores para jugar ...a6 (evita Ab5+ o Cb5) y luego busca contrajuego en el flanco de dama con ...b5 mientras blancas ataca en el flanco de rey.</a:t>
             </a:r>
             <a:endParaRPr lang="en-US" sz="1600" dirty="0"/>
           </a:p>
